--- a/PPTs/Ch16_Timer_PWM Exercises ANS.pptx
+++ b/PPTs/Ch16_Timer_PWM Exercises ANS.pptx
@@ -8585,7 +8585,7 @@
           <a:p>
             <a:r>
               <a:rPr lang="en-US" dirty="0"/>
-              <a:t>Fall 2025</a:t>
+              <a:t>Fall 2026</a:t>
             </a:r>
           </a:p>
         </p:txBody>
@@ -15416,7 +15416,7 @@
                 <a:latin typeface="Times New Roman" panose="02020603050405020304" pitchFamily="18" charset="0"/>
                 <a:ea typeface="SimSun" panose="02010600030101010101" pitchFamily="2" charset="-122"/>
               </a:rPr>
-              <a:t>PWM output is high on when the counter is 499, 500, 501, …, 1999, a total of 1501 cycles. (This statement is not required in the exam.)</a:t>
+              <a:t>PWM output is high when the counter is 499, 500, 501, …, 1999, a total of 1501 cycles. (This statement is not required in the exam.)</a:t>
             </a:r>
           </a:p>
         </p:txBody>
